--- a/lessons/lesson01/practice/git_intro.pptx
+++ b/lessons/lesson01/practice/git_intro.pptx
@@ -8453,7 +8453,7 @@
             <a:r>
               <a:rPr lang="ru-RU" altLang="en-US" sz="3600">
                 <a:solidFill>
-                  <a:schemeClr val="tx2"/>
+                  <a:schemeClr val="bg1"/>
                 </a:solidFill>
                 <a:effectLst>
                   <a:outerShdw blurRad="38100" dist="38100" dir="2700000" algn="tl">
@@ -8469,7 +8469,7 @@
             </a:r>
             <a:endParaRPr lang="ru-RU" altLang="en-US" sz="3600">
               <a:solidFill>
-                <a:schemeClr val="tx2"/>
+                <a:schemeClr val="bg1"/>
               </a:solidFill>
               <a:effectLst>
                 <a:outerShdw blurRad="38100" dist="38100" dir="2700000" algn="tl">
@@ -8509,7 +8509,7 @@
             <a:r>
               <a:rPr lang="ru-RU" altLang="en-US" sz="3600">
                 <a:solidFill>
-                  <a:schemeClr val="tx2"/>
+                  <a:schemeClr val="bg1"/>
                 </a:solidFill>
                 <a:effectLst>
                   <a:outerShdw blurRad="38100" dist="38100" dir="2700000" algn="tl">
@@ -8525,7 +8525,7 @@
             </a:r>
             <a:endParaRPr lang="ru-RU" altLang="en-US" sz="3600">
               <a:solidFill>
-                <a:schemeClr val="tx2"/>
+                <a:schemeClr val="bg1"/>
               </a:solidFill>
               <a:effectLst>
                 <a:outerShdw blurRad="38100" dist="38100" dir="2700000" algn="tl">
@@ -8565,7 +8565,7 @@
             <a:r>
               <a:rPr lang="ru-RU" altLang="en-US" sz="3600">
                 <a:solidFill>
-                  <a:schemeClr val="tx2"/>
+                  <a:schemeClr val="bg1"/>
                 </a:solidFill>
                 <a:effectLst>
                   <a:outerShdw blurRad="38100" dist="38100" dir="2700000" algn="tl">
@@ -8581,7 +8581,7 @@
             </a:r>
             <a:endParaRPr lang="ru-RU" altLang="en-US" sz="3600">
               <a:solidFill>
-                <a:schemeClr val="tx2"/>
+                <a:schemeClr val="bg1"/>
               </a:solidFill>
               <a:effectLst>
                 <a:outerShdw blurRad="38100" dist="38100" dir="2700000" algn="tl">
@@ -8621,7 +8621,7 @@
             <a:r>
               <a:rPr lang="ru-RU" altLang="en-US" sz="3600">
                 <a:solidFill>
-                  <a:schemeClr val="tx2"/>
+                  <a:schemeClr val="bg1"/>
                 </a:solidFill>
                 <a:effectLst>
                   <a:outerShdw blurRad="38100" dist="38100" dir="2700000" algn="tl">
@@ -8637,7 +8637,7 @@
             </a:r>
             <a:endParaRPr lang="ru-RU" altLang="en-US" sz="3600">
               <a:solidFill>
-                <a:schemeClr val="tx2"/>
+                <a:schemeClr val="bg1"/>
               </a:solidFill>
               <a:effectLst>
                 <a:outerShdw blurRad="38100" dist="38100" dir="2700000" algn="tl">
